--- a/Постер - инновационная web3 сеть.pptx
+++ b/Постер - инновационная web3 сеть.pptx
@@ -131,7 +131,7 @@
       </p:grpSpPr>
       <p:sp>
         <p:nvSpPr>
-          <p:cNvPr id="1736928423" name="Header Placeholder 1"/>
+          <p:cNvPr id="881173686" name="Header Placeholder 1"/>
           <p:cNvSpPr>
             <a:spLocks noGrp="1"/>
           </p:cNvSpPr>
@@ -165,7 +165,7 @@
       </p:sp>
       <p:sp>
         <p:nvSpPr>
-          <p:cNvPr id="699265108" name="Date Placeholder 2"/>
+          <p:cNvPr id="1591466182" name="Date Placeholder 2"/>
           <p:cNvSpPr>
             <a:spLocks noGrp="1"/>
           </p:cNvSpPr>
@@ -203,7 +203,7 @@
       </p:sp>
       <p:sp>
         <p:nvSpPr>
-          <p:cNvPr id="1302529201" name="Slide Image Placeholder 3"/>
+          <p:cNvPr id="1219907464" name="Slide Image Placeholder 3"/>
           <p:cNvSpPr>
             <a:spLocks noChangeAspect="1" noGrp="1" noRot="1"/>
           </p:cNvSpPr>
@@ -239,7 +239,7 @@
       </p:sp>
       <p:sp>
         <p:nvSpPr>
-          <p:cNvPr id="2079294347" name="Notes Placeholder 4"/>
+          <p:cNvPr id="1793767127" name="Notes Placeholder 4"/>
           <p:cNvSpPr>
             <a:spLocks noGrp="1"/>
           </p:cNvSpPr>
@@ -313,7 +313,7 @@
       </p:sp>
       <p:sp>
         <p:nvSpPr>
-          <p:cNvPr id="1343688412" name="Footer Placeholder 5"/>
+          <p:cNvPr id="892323368" name="Footer Placeholder 5"/>
           <p:cNvSpPr>
             <a:spLocks noGrp="1"/>
           </p:cNvSpPr>
@@ -347,7 +347,7 @@
       </p:sp>
       <p:sp>
         <p:nvSpPr>
-          <p:cNvPr id="45956535" name="Slide Number Placeholder 6"/>
+          <p:cNvPr id="1969087295" name="Slide Number Placeholder 6"/>
           <p:cNvSpPr>
             <a:spLocks noGrp="1"/>
           </p:cNvSpPr>
@@ -500,7 +500,7 @@
       </p:grpSpPr>
       <p:sp>
         <p:nvSpPr>
-          <p:cNvPr id="1151844899" name="Slide Image Placeholder 1"/>
+          <p:cNvPr id="784529232" name="Slide Image Placeholder 1"/>
           <p:cNvSpPr>
             <a:spLocks noChangeAspect="1" noGrp="1" noRot="1"/>
           </p:cNvSpPr>
@@ -512,7 +512,7 @@
       </p:sp>
       <p:sp>
         <p:nvSpPr>
-          <p:cNvPr id="175047835" name="Notes Placeholder 2"/>
+          <p:cNvPr id="1287847862" name="Notes Placeholder 2"/>
           <p:cNvSpPr>
             <a:spLocks noGrp="1"/>
           </p:cNvSpPr>
@@ -534,7 +534,7 @@
       </p:sp>
       <p:sp>
         <p:nvSpPr>
-          <p:cNvPr id="104802771" name="Slide Number Placeholder 3"/>
+          <p:cNvPr id="1820945110" name="Slide Number Placeholder 3"/>
           <p:cNvSpPr>
             <a:spLocks noGrp="1"/>
           </p:cNvSpPr>
@@ -899,7 +899,7 @@
       </p:grpSpPr>
       <p:sp>
         <p:nvSpPr>
-          <p:cNvPr id="1877680706" name="Shape 34"/>
+          <p:cNvPr id="727978937" name="Shape 34"/>
           <p:cNvSpPr/>
           <p:nvPr/>
         </p:nvSpPr>
@@ -945,14 +945,14 @@
       </p:sp>
       <p:sp>
         <p:nvSpPr>
-          <p:cNvPr id="1838642159" name="Shape 34"/>
+          <p:cNvPr id="1648716797" name="Shape 34"/>
           <p:cNvSpPr/>
           <p:nvPr/>
         </p:nvSpPr>
         <p:spPr bwMode="auto">
           <a:xfrm flipH="0" flipV="0">
             <a:off x="1019277" y="15242423"/>
-            <a:ext cx="8743424" cy="18640095"/>
+            <a:ext cx="8743424" cy="18640094"/>
           </a:xfrm>
           <a:prstGeom prst="roundRect">
             <a:avLst>
@@ -991,7 +991,7 @@
       </p:sp>
       <p:sp>
         <p:nvSpPr>
-          <p:cNvPr id="550284465" name="Shape 34"/>
+          <p:cNvPr id="1697265776" name="Shape 34"/>
           <p:cNvSpPr/>
           <p:nvPr/>
         </p:nvSpPr>
@@ -1037,7 +1037,7 @@
       </p:sp>
       <p:sp>
         <p:nvSpPr>
-          <p:cNvPr id="643297531" name="Shape 34"/>
+          <p:cNvPr id="106412304" name="Shape 34"/>
           <p:cNvSpPr/>
           <p:nvPr/>
         </p:nvSpPr>
@@ -1083,7 +1083,7 @@
       </p:sp>
       <p:sp>
         <p:nvSpPr>
-          <p:cNvPr id="1468175226" name="Shape 34"/>
+          <p:cNvPr id="696134539" name="Shape 34"/>
           <p:cNvSpPr/>
           <p:nvPr/>
         </p:nvSpPr>
@@ -1129,7 +1129,7 @@
       </p:sp>
       <p:sp>
         <p:nvSpPr>
-          <p:cNvPr id="698337481" name="Shape 34"/>
+          <p:cNvPr id="1696139730" name="Shape 34"/>
           <p:cNvSpPr/>
           <p:nvPr/>
         </p:nvSpPr>
@@ -1175,13 +1175,13 @@
       </p:sp>
       <p:sp>
         <p:nvSpPr>
-          <p:cNvPr id="645761409" name="Shape 34"/>
+          <p:cNvPr id="1604666846" name="Shape 34"/>
           <p:cNvSpPr/>
           <p:nvPr/>
         </p:nvSpPr>
         <p:spPr bwMode="auto">
           <a:xfrm flipH="0" flipV="0">
-            <a:off x="10734422" y="4618568"/>
+            <a:off x="10734422" y="4618567"/>
             <a:ext cx="8852025" cy="10043716"/>
           </a:xfrm>
           <a:prstGeom prst="roundRect">
@@ -1221,7 +1221,7 @@
       </p:sp>
       <p:sp>
         <p:nvSpPr>
-          <p:cNvPr id="1063703080" name="Shape 34"/>
+          <p:cNvPr id="1500224339" name="Shape 34"/>
           <p:cNvSpPr/>
           <p:nvPr/>
         </p:nvSpPr>
@@ -1267,7 +1267,7 @@
       </p:sp>
       <p:sp>
         <p:nvSpPr>
-          <p:cNvPr id="1458917490" name=""/>
+          <p:cNvPr id="662247132" name=""/>
           <p:cNvSpPr/>
           <p:nvPr/>
         </p:nvSpPr>
@@ -1313,7 +1313,7 @@
       </p:sp>
       <p:cxnSp>
         <p:nvCxnSpPr>
-          <p:cNvPr id="442872965" name=""/>
+          <p:cNvPr id="1969400573" name=""/>
           <p:cNvCxnSpPr/>
           <p:nvPr/>
         </p:nvCxnSpPr>
@@ -1352,14 +1352,14 @@
       </p:cxnSp>
       <p:sp>
         <p:nvSpPr>
-          <p:cNvPr id="945564198" name="Text 1"/>
+          <p:cNvPr id="1466760275" name="Text 1"/>
           <p:cNvSpPr/>
           <p:nvPr/>
         </p:nvSpPr>
         <p:spPr bwMode="auto">
           <a:xfrm flipH="0" flipV="0">
-            <a:off x="516299" y="317611"/>
-            <a:ext cx="29619109" cy="3455727"/>
+            <a:off x="-32938" y="317610"/>
+            <a:ext cx="30334642" cy="3455726"/>
           </a:xfrm>
           <a:prstGeom prst="rect">
             <a:avLst/>
@@ -1368,7 +1368,7 @@
           <a:ln/>
         </p:spPr>
         <p:txBody>
-          <a:bodyPr vertOverflow="overflow" horzOverflow="overflow" vert="horz" wrap="square" lIns="760" tIns="760" rIns="760" bIns="760" numCol="1" spcCol="0" rtlCol="0" fromWordArt="0" anchor="ctr" anchorCtr="0" forceAA="0" upright="0" compatLnSpc="0">
+          <a:bodyPr vertOverflow="overflow" horzOverflow="overflow" vert="horz" wrap="square" lIns="759" tIns="759" rIns="759" bIns="759" numCol="1" spcCol="0" rtlCol="0" fromWordArt="0" anchor="ctr" anchorCtr="0" forceAA="0" upright="0" compatLnSpc="0">
             <a:normAutofit fontScale="90000" lnSpcReduction="2000"/>
           </a:bodyPr>
           <a:lstStyle/>
@@ -1476,7 +1476,7 @@
       </p:sp>
       <p:sp>
         <p:nvSpPr>
-          <p:cNvPr id="1154199620" name="Text 4"/>
+          <p:cNvPr id="953692426" name="Text 4"/>
           <p:cNvSpPr/>
           <p:nvPr/>
         </p:nvSpPr>
@@ -1521,7 +1521,7 @@
       </p:sp>
       <p:sp>
         <p:nvSpPr>
-          <p:cNvPr id="1184545857" name="Shape 6"/>
+          <p:cNvPr id="1198283534" name="Shape 6"/>
           <p:cNvSpPr/>
           <p:nvPr/>
         </p:nvSpPr>
@@ -1560,7 +1560,7 @@
       </p:sp>
       <p:sp>
         <p:nvSpPr>
-          <p:cNvPr id="876287782" name="Shape 8"/>
+          <p:cNvPr id="1918553290" name="Shape 8"/>
           <p:cNvSpPr/>
           <p:nvPr/>
         </p:nvSpPr>
@@ -1599,7 +1599,7 @@
       </p:sp>
       <p:sp>
         <p:nvSpPr>
-          <p:cNvPr id="1975547899" name="Text 12"/>
+          <p:cNvPr id="961632739" name="Text 12"/>
           <p:cNvSpPr/>
           <p:nvPr/>
         </p:nvSpPr>
@@ -1644,7 +1644,7 @@
       </p:sp>
       <p:sp>
         <p:nvSpPr>
-          <p:cNvPr id="1054413530" name="Shape 32"/>
+          <p:cNvPr id="373043351" name="Shape 32"/>
           <p:cNvSpPr/>
           <p:nvPr/>
         </p:nvSpPr>
@@ -1668,7 +1668,7 @@
       </p:sp>
       <p:sp>
         <p:nvSpPr>
-          <p:cNvPr id="1244007092" name="Shape 34"/>
+          <p:cNvPr id="2079697651" name="Shape 34"/>
           <p:cNvSpPr/>
           <p:nvPr/>
         </p:nvSpPr>
@@ -1714,7 +1714,7 @@
       </p:sp>
       <p:sp>
         <p:nvSpPr>
-          <p:cNvPr id="1688867132" name="Text 35"/>
+          <p:cNvPr id="2062734751" name="Text 35"/>
           <p:cNvSpPr/>
           <p:nvPr/>
         </p:nvSpPr>
@@ -1759,7 +1759,7 @@
       </p:sp>
       <p:sp>
         <p:nvSpPr>
-          <p:cNvPr id="1645196023" name="Text 36"/>
+          <p:cNvPr id="195207446" name="Text 36"/>
           <p:cNvSpPr/>
           <p:nvPr/>
         </p:nvSpPr>
@@ -1851,7 +1851,7 @@
       </p:sp>
       <p:sp>
         <p:nvSpPr>
-          <p:cNvPr id="1856921571" name="Text 97"/>
+          <p:cNvPr id="291433635" name="Text 97"/>
           <p:cNvSpPr/>
           <p:nvPr/>
         </p:nvSpPr>
@@ -1921,7 +1921,7 @@
       </p:sp>
       <p:sp>
         <p:nvSpPr>
-          <p:cNvPr id="732631528" name="Text 122"/>
+          <p:cNvPr id="1833697443" name="Text 122"/>
           <p:cNvSpPr/>
           <p:nvPr/>
         </p:nvSpPr>
@@ -1966,7 +1966,7 @@
       </p:sp>
       <p:sp>
         <p:nvSpPr>
-          <p:cNvPr id="975662883" name="Shape 123"/>
+          <p:cNvPr id="688182040" name="Shape 123"/>
           <p:cNvSpPr/>
           <p:nvPr/>
         </p:nvSpPr>
@@ -2005,7 +2005,7 @@
       </p:sp>
       <p:sp>
         <p:nvSpPr>
-          <p:cNvPr id="629050777" name="Text 124"/>
+          <p:cNvPr id="194020199" name="Text 124"/>
           <p:cNvSpPr/>
           <p:nvPr/>
         </p:nvSpPr>
@@ -2050,7 +2050,7 @@
       </p:sp>
       <p:sp>
         <p:nvSpPr>
-          <p:cNvPr id="737533539" name="Text 125"/>
+          <p:cNvPr id="1189662816" name="Text 125"/>
           <p:cNvSpPr/>
           <p:nvPr/>
         </p:nvSpPr>
@@ -2095,7 +2095,7 @@
       </p:sp>
       <p:sp>
         <p:nvSpPr>
-          <p:cNvPr id="1236946590" name="Shape 126"/>
+          <p:cNvPr id="207983662" name="Shape 126"/>
           <p:cNvSpPr/>
           <p:nvPr/>
         </p:nvSpPr>
@@ -2134,13 +2134,13 @@
       </p:sp>
       <p:sp>
         <p:nvSpPr>
-          <p:cNvPr id="1194668965" name="Text 127"/>
+          <p:cNvPr id="1547905943" name="Text 127"/>
           <p:cNvSpPr/>
           <p:nvPr/>
         </p:nvSpPr>
         <p:spPr bwMode="auto">
           <a:xfrm>
-            <a:off x="13738160" y="26556928"/>
+            <a:off x="13738160" y="26556927"/>
             <a:ext cx="2743200" cy="594360"/>
           </a:xfrm>
           <a:prstGeom prst="rect">
@@ -2179,7 +2179,7 @@
       </p:sp>
       <p:sp>
         <p:nvSpPr>
-          <p:cNvPr id="1380307226" name="Text 128"/>
+          <p:cNvPr id="1086420697" name="Text 128"/>
           <p:cNvSpPr/>
           <p:nvPr/>
         </p:nvSpPr>
@@ -2224,7 +2224,7 @@
       </p:sp>
       <p:sp>
         <p:nvSpPr>
-          <p:cNvPr id="945759976" name="Shape 129"/>
+          <p:cNvPr id="1315857121" name="Shape 129"/>
           <p:cNvSpPr/>
           <p:nvPr/>
         </p:nvSpPr>
@@ -2263,7 +2263,7 @@
       </p:sp>
       <p:sp>
         <p:nvSpPr>
-          <p:cNvPr id="732770156" name="Text 130"/>
+          <p:cNvPr id="330122467" name="Text 130"/>
           <p:cNvSpPr/>
           <p:nvPr/>
         </p:nvSpPr>
@@ -2308,7 +2308,7 @@
       </p:sp>
       <p:sp>
         <p:nvSpPr>
-          <p:cNvPr id="187499527" name="Text 131"/>
+          <p:cNvPr id="700554211" name="Text 131"/>
           <p:cNvSpPr/>
           <p:nvPr/>
         </p:nvSpPr>
@@ -2353,7 +2353,7 @@
       </p:sp>
       <p:sp>
         <p:nvSpPr>
-          <p:cNvPr id="227846884" name="Shape 133"/>
+          <p:cNvPr id="668736413" name="Shape 133"/>
           <p:cNvSpPr/>
           <p:nvPr/>
         </p:nvSpPr>
@@ -2392,13 +2392,13 @@
       </p:sp>
       <p:sp>
         <p:nvSpPr>
-          <p:cNvPr id="1030360493" name="Text 137"/>
+          <p:cNvPr id="807351387" name="Text 137"/>
           <p:cNvSpPr/>
           <p:nvPr/>
         </p:nvSpPr>
         <p:spPr bwMode="auto">
           <a:xfrm flipH="0" flipV="0">
-            <a:off x="1048470" y="35399836"/>
+            <a:off x="1148774" y="35399835"/>
             <a:ext cx="8714232" cy="5740742"/>
           </a:xfrm>
           <a:prstGeom prst="rect">
@@ -2581,7 +2581,7 @@
             </a:endParaRPr>
           </a:p>
           <a:p>
-            <a:pPr marL="0" indent="0">
+            <a:pPr marL="400050" lvl="1" indent="0">
               <a:buNone/>
               <a:defRPr/>
             </a:pPr>
@@ -2602,7 +2602,7 @@
             </a:endParaRPr>
           </a:p>
           <a:p>
-            <a:pPr marL="0" indent="0">
+            <a:pPr marL="400050" lvl="1" indent="0">
               <a:buNone/>
               <a:defRPr/>
             </a:pPr>
@@ -2623,7 +2623,7 @@
             </a:endParaRPr>
           </a:p>
           <a:p>
-            <a:pPr marL="0" indent="0">
+            <a:pPr marL="400050" lvl="1" indent="0">
               <a:buNone/>
               <a:defRPr/>
             </a:pPr>
@@ -2644,7 +2644,7 @@
             </a:endParaRPr>
           </a:p>
           <a:p>
-            <a:pPr marL="0" indent="0">
+            <a:pPr marL="400050" lvl="1" indent="0">
               <a:buNone/>
               <a:defRPr/>
             </a:pPr>
@@ -2657,7 +2657,7 @@
                 <a:ea typeface="Roboto"/>
                 <a:cs typeface="Roboto"/>
               </a:rPr>
-              <a:t>• защищённые распределённые платформы.</a:t>
+              <a:t>• распределённые платформы.</a:t>
             </a:r>
             <a:endParaRPr lang="ru-RU" sz="3200">
               <a:solidFill>
@@ -2682,7 +2682,7 @@
       </p:sp>
       <p:sp>
         <p:nvSpPr>
-          <p:cNvPr id="1875488937" name="Text 140"/>
+          <p:cNvPr id="1936622512" name="Text 140"/>
           <p:cNvSpPr/>
           <p:nvPr/>
         </p:nvSpPr>
@@ -2999,7 +2999,7 @@
       </p:sp>
       <p:sp>
         <p:nvSpPr>
-          <p:cNvPr id="1052404413" name="Text 145"/>
+          <p:cNvPr id="44319901" name="Text 145"/>
           <p:cNvSpPr/>
           <p:nvPr/>
         </p:nvSpPr>
@@ -3289,7 +3289,7 @@
       </p:sp>
       <p:sp>
         <p:nvSpPr>
-          <p:cNvPr id="184436328" name="Shape 146"/>
+          <p:cNvPr id="980332545" name="Shape 146"/>
           <p:cNvSpPr/>
           <p:nvPr/>
         </p:nvSpPr>
@@ -3326,7 +3326,7 @@
       </p:sp>
       <p:sp>
         <p:nvSpPr>
-          <p:cNvPr id="1060421923" name=""/>
+          <p:cNvPr id="1664653357" name=""/>
           <p:cNvSpPr/>
           <p:nvPr/>
         </p:nvSpPr>
@@ -3390,7 +3390,7 @@
       </p:sp>
       <p:sp>
         <p:nvSpPr>
-          <p:cNvPr id="1324672870" name=""/>
+          <p:cNvPr id="1675854846" name=""/>
           <p:cNvSpPr/>
           <p:nvPr/>
         </p:nvSpPr>
@@ -3454,7 +3454,7 @@
       </p:sp>
       <p:sp>
         <p:nvSpPr>
-          <p:cNvPr id="1926204839" name=""/>
+          <p:cNvPr id="1826817066" name=""/>
           <p:cNvSpPr/>
           <p:nvPr/>
         </p:nvSpPr>
@@ -3518,7 +3518,7 @@
       </p:sp>
       <p:sp>
         <p:nvSpPr>
-          <p:cNvPr id="1715834938" name=""/>
+          <p:cNvPr id="1267434061" name=""/>
           <p:cNvSpPr/>
           <p:nvPr/>
         </p:nvSpPr>
@@ -3593,7 +3593,7 @@
       </p:sp>
       <p:sp>
         <p:nvSpPr>
-          <p:cNvPr id="2050023497" name=""/>
+          <p:cNvPr id="1751087248" name=""/>
           <p:cNvSpPr/>
           <p:nvPr/>
         </p:nvSpPr>
@@ -3657,7 +3657,7 @@
       </p:sp>
       <p:sp>
         <p:nvSpPr>
-          <p:cNvPr id="1144811109" name=""/>
+          <p:cNvPr id="431132061" name=""/>
           <p:cNvSpPr/>
           <p:nvPr/>
         </p:nvSpPr>
@@ -3721,7 +3721,7 @@
       </p:sp>
       <p:sp>
         <p:nvSpPr>
-          <p:cNvPr id="686313905" name=""/>
+          <p:cNvPr id="62525850" name=""/>
           <p:cNvSpPr/>
           <p:nvPr/>
         </p:nvSpPr>
@@ -3782,7 +3782,7 @@
       </p:sp>
       <p:sp>
         <p:nvSpPr>
-          <p:cNvPr id="1917121719" name=""/>
+          <p:cNvPr id="1021279439" name=""/>
           <p:cNvSpPr/>
           <p:nvPr/>
         </p:nvSpPr>
@@ -3843,7 +3843,7 @@
       </p:sp>
       <p:sp>
         <p:nvSpPr>
-          <p:cNvPr id="1469959458" name="Shape 28"/>
+          <p:cNvPr id="1864325180" name="Shape 28"/>
           <p:cNvSpPr/>
           <p:nvPr/>
         </p:nvSpPr>
@@ -3867,7 +3867,7 @@
       </p:sp>
       <p:sp>
         <p:nvSpPr>
-          <p:cNvPr id="1284217963" name=""/>
+          <p:cNvPr id="1503864172" name=""/>
           <p:cNvSpPr/>
           <p:nvPr/>
         </p:nvSpPr>
@@ -3928,7 +3928,7 @@
       </p:sp>
       <p:sp>
         <p:nvSpPr>
-          <p:cNvPr id="1476053403" name="Shape 28"/>
+          <p:cNvPr id="502461731" name="Shape 28"/>
           <p:cNvSpPr/>
           <p:nvPr/>
         </p:nvSpPr>
@@ -3952,7 +3952,7 @@
       </p:sp>
       <p:sp>
         <p:nvSpPr>
-          <p:cNvPr id="713880806" name=""/>
+          <p:cNvPr id="2035845707" name=""/>
           <p:cNvSpPr/>
           <p:nvPr/>
         </p:nvSpPr>
@@ -4016,13 +4016,13 @@
       </p:sp>
       <p:graphicFrame>
         <p:nvGraphicFramePr>
-          <p:cNvPr id="1369443299" name=""/>
+          <p:cNvPr id="1034324784" name=""/>
           <p:cNvGraphicFramePr>
             <a:graphicFrameLocks xmlns:a="http://schemas.openxmlformats.org/drawingml/2006/main"/>
           </p:cNvGraphicFramePr>
           <p:nvPr/>
         </p:nvGraphicFramePr>
-        <p:xfrm>
+        <p:xfrm rot="0">
           <a:off x="20655534" y="7489122"/>
           <a:ext cx="8304827" cy="4633504"/>
         </p:xfrm>
@@ -4906,7 +4906,7 @@
       </p:graphicFrame>
       <p:sp>
         <p:nvSpPr>
-          <p:cNvPr id="1600661403" name=""/>
+          <p:cNvPr id="1462309197" name=""/>
           <p:cNvSpPr/>
           <p:nvPr/>
         </p:nvSpPr>
@@ -4980,13 +4980,13 @@
       </p:sp>
       <p:sp>
         <p:nvSpPr>
-          <p:cNvPr id="2008809283" name=""/>
+          <p:cNvPr id="2060535176" name=""/>
           <p:cNvSpPr/>
           <p:nvPr/>
         </p:nvSpPr>
         <p:spPr bwMode="auto">
           <a:xfrm rot="0" flipH="0" flipV="0">
-            <a:off x="14143060" y="6093041"/>
+            <a:off x="14143059" y="6093041"/>
             <a:ext cx="2038349" cy="1028698"/>
           </a:xfrm>
           <a:prstGeom prst="roundRect">
@@ -5037,7 +5037,7 @@
       </p:sp>
       <p:sp>
         <p:nvSpPr>
-          <p:cNvPr id="1546049180" name=""/>
+          <p:cNvPr id="1382251087" name=""/>
           <p:cNvSpPr/>
           <p:nvPr/>
         </p:nvSpPr>
@@ -5094,7 +5094,7 @@
       </p:sp>
       <p:sp>
         <p:nvSpPr>
-          <p:cNvPr id="1978309633" name=""/>
+          <p:cNvPr id="366196529" name=""/>
           <p:cNvSpPr/>
           <p:nvPr/>
         </p:nvSpPr>
@@ -5151,7 +5151,7 @@
       </p:sp>
       <p:sp>
         <p:nvSpPr>
-          <p:cNvPr id="606063833" name=""/>
+          <p:cNvPr id="862998757" name=""/>
           <p:cNvSpPr/>
           <p:nvPr/>
         </p:nvSpPr>
@@ -5208,7 +5208,7 @@
       </p:sp>
       <p:sp>
         <p:nvSpPr>
-          <p:cNvPr id="886017288" name=""/>
+          <p:cNvPr id="1489683700" name=""/>
           <p:cNvSpPr/>
           <p:nvPr/>
         </p:nvSpPr>
@@ -5265,7 +5265,7 @@
       </p:sp>
       <p:sp>
         <p:nvSpPr>
-          <p:cNvPr id="337241019" name=""/>
+          <p:cNvPr id="222796813" name=""/>
           <p:cNvSpPr/>
           <p:nvPr/>
         </p:nvSpPr>
@@ -5322,7 +5322,7 @@
       </p:sp>
       <p:sp>
         <p:nvSpPr>
-          <p:cNvPr id="1480413381" name=""/>
+          <p:cNvPr id="809049473" name=""/>
           <p:cNvSpPr/>
           <p:nvPr/>
         </p:nvSpPr>
@@ -5379,7 +5379,7 @@
       </p:sp>
       <p:sp>
         <p:nvSpPr>
-          <p:cNvPr id="741839918" name=""/>
+          <p:cNvPr id="729182884" name=""/>
           <p:cNvSpPr txBox="1"/>
           <p:nvPr/>
         </p:nvSpPr>
@@ -5407,7 +5407,7 @@
       </p:sp>
       <p:sp>
         <p:nvSpPr>
-          <p:cNvPr id="473389773" name=""/>
+          <p:cNvPr id="1315633767" name=""/>
           <p:cNvSpPr/>
           <p:nvPr/>
         </p:nvSpPr>
@@ -5467,13 +5467,13 @@
       </p:sp>
       <p:sp>
         <p:nvSpPr>
-          <p:cNvPr id="434686099" name=""/>
+          <p:cNvPr id="249102735" name=""/>
           <p:cNvSpPr/>
           <p:nvPr/>
         </p:nvSpPr>
         <p:spPr bwMode="auto">
           <a:xfrm rot="0" flipH="0" flipV="0">
-            <a:off x="12731155" y="8169491"/>
+            <a:off x="12731154" y="8169491"/>
             <a:ext cx="232833" cy="271895"/>
           </a:xfrm>
           <a:prstGeom prst="downArrow">
@@ -5505,7 +5505,7 @@
       </p:sp>
       <p:sp>
         <p:nvSpPr>
-          <p:cNvPr id="2082200671" name=""/>
+          <p:cNvPr id="396240604" name=""/>
           <p:cNvSpPr/>
           <p:nvPr/>
         </p:nvSpPr>
@@ -5543,7 +5543,7 @@
       </p:sp>
       <p:sp>
         <p:nvSpPr>
-          <p:cNvPr id="67927638" name=""/>
+          <p:cNvPr id="1167262454" name=""/>
           <p:cNvSpPr/>
           <p:nvPr/>
         </p:nvSpPr>
@@ -5581,7 +5581,7 @@
       </p:sp>
       <p:sp>
         <p:nvSpPr>
-          <p:cNvPr id="1448853785" name=""/>
+          <p:cNvPr id="2014238340" name=""/>
           <p:cNvSpPr/>
           <p:nvPr/>
         </p:nvSpPr>
@@ -5619,7 +5619,7 @@
       </p:sp>
       <p:sp>
         <p:nvSpPr>
-          <p:cNvPr id="1508601709" name=""/>
+          <p:cNvPr id="725904309" name=""/>
           <p:cNvSpPr/>
           <p:nvPr/>
         </p:nvSpPr>
@@ -5657,7 +5657,7 @@
       </p:sp>
       <p:sp>
         <p:nvSpPr>
-          <p:cNvPr id="1642024836" name=""/>
+          <p:cNvPr id="743512131" name=""/>
           <p:cNvSpPr/>
           <p:nvPr/>
         </p:nvSpPr>
@@ -5713,7 +5713,7 @@
       </p:sp>
       <p:sp>
         <p:nvSpPr>
-          <p:cNvPr id="710903148" name=""/>
+          <p:cNvPr id="1000054607" name=""/>
           <p:cNvSpPr txBox="1"/>
           <p:nvPr/>
         </p:nvSpPr>
@@ -5755,7 +5755,7 @@
       </p:sp>
       <p:sp>
         <p:nvSpPr>
-          <p:cNvPr id="754234048" name=""/>
+          <p:cNvPr id="1183625213" name=""/>
           <p:cNvSpPr/>
           <p:nvPr/>
         </p:nvSpPr>
@@ -5794,7 +5794,7 @@
       </p:sp>
       <p:sp>
         <p:nvSpPr>
-          <p:cNvPr id="2088719509" name=""/>
+          <p:cNvPr id="801137395" name=""/>
           <p:cNvSpPr/>
           <p:nvPr/>
         </p:nvSpPr>
@@ -5833,7 +5833,7 @@
       </p:sp>
       <p:sp>
         <p:nvSpPr>
-          <p:cNvPr id="271045773" name=""/>
+          <p:cNvPr id="1012072489" name=""/>
           <p:cNvSpPr/>
           <p:nvPr/>
         </p:nvSpPr>
@@ -5872,7 +5872,7 @@
       </p:sp>
       <p:sp>
         <p:nvSpPr>
-          <p:cNvPr id="901690210" name=""/>
+          <p:cNvPr id="141734705" name=""/>
           <p:cNvSpPr/>
           <p:nvPr/>
         </p:nvSpPr>
@@ -5911,7 +5911,7 @@
       </p:sp>
       <p:sp>
         <p:nvSpPr>
-          <p:cNvPr id="1264687619" name=""/>
+          <p:cNvPr id="1601471847" name=""/>
           <p:cNvSpPr/>
           <p:nvPr/>
         </p:nvSpPr>
@@ -5949,7 +5949,7 @@
       </p:sp>
       <p:sp>
         <p:nvSpPr>
-          <p:cNvPr id="133559857" name=""/>
+          <p:cNvPr id="1069933330" name=""/>
           <p:cNvSpPr/>
           <p:nvPr/>
         </p:nvSpPr>
@@ -5987,7 +5987,7 @@
       </p:sp>
       <p:sp>
         <p:nvSpPr>
-          <p:cNvPr id="864219535" name="Shape 34"/>
+          <p:cNvPr id="1671483059" name="Shape 34"/>
           <p:cNvSpPr/>
           <p:nvPr/>
         </p:nvSpPr>
@@ -6033,7 +6033,7 @@
       </p:sp>
       <p:sp>
         <p:nvSpPr>
-          <p:cNvPr id="1365842016" name="Text 12"/>
+          <p:cNvPr id="1763643609" name="Text 12"/>
           <p:cNvSpPr/>
           <p:nvPr/>
         </p:nvSpPr>
@@ -6078,7 +6078,7 @@
       </p:sp>
       <p:sp>
         <p:nvSpPr>
-          <p:cNvPr id="1574309776" name="Shape 32"/>
+          <p:cNvPr id="614970842" name="Shape 32"/>
           <p:cNvSpPr/>
           <p:nvPr/>
         </p:nvSpPr>
@@ -6102,7 +6102,7 @@
       </p:sp>
       <p:sp>
         <p:nvSpPr>
-          <p:cNvPr id="1417143847" name=""/>
+          <p:cNvPr id="423845709" name=""/>
           <p:cNvSpPr/>
           <p:nvPr/>
         </p:nvSpPr>
@@ -6166,7 +6166,7 @@
       </p:sp>
       <p:sp>
         <p:nvSpPr>
-          <p:cNvPr id="877400550" name="Text 10"/>
+          <p:cNvPr id="1521982109" name="Text 10"/>
           <p:cNvSpPr/>
           <p:nvPr/>
         </p:nvSpPr>
@@ -6196,7 +6196,7 @@
       </p:sp>
       <p:cxnSp>
         <p:nvCxnSpPr>
-          <p:cNvPr id="715472009" name=""/>
+          <p:cNvPr id="1660607386" name=""/>
           <p:cNvCxnSpPr/>
           <p:nvPr/>
         </p:nvCxnSpPr>
@@ -6241,7 +6241,7 @@
       </p:cxnSp>
       <p:cxnSp>
         <p:nvCxnSpPr>
-          <p:cNvPr id="472496149" name=""/>
+          <p:cNvPr id="1008668316" name=""/>
           <p:cNvCxnSpPr/>
           <p:nvPr/>
         </p:nvCxnSpPr>
@@ -6286,7 +6286,7 @@
       </p:cxnSp>
       <p:sp>
         <p:nvSpPr>
-          <p:cNvPr id="581466289" name=""/>
+          <p:cNvPr id="5245069" name=""/>
           <p:cNvSpPr/>
           <p:nvPr/>
         </p:nvSpPr>
@@ -6326,7 +6326,7 @@
       </p:sp>
       <p:sp>
         <p:nvSpPr>
-          <p:cNvPr id="1533155481" name=""/>
+          <p:cNvPr id="33047900" name=""/>
           <p:cNvSpPr/>
           <p:nvPr/>
         </p:nvSpPr>
@@ -6366,7 +6366,7 @@
       </p:sp>
       <p:sp>
         <p:nvSpPr>
-          <p:cNvPr id="1358191167" name=""/>
+          <p:cNvPr id="623700787" name=""/>
           <p:cNvSpPr/>
           <p:nvPr/>
         </p:nvSpPr>
@@ -6431,7 +6431,7 @@
       </p:sp>
       <p:sp>
         <p:nvSpPr>
-          <p:cNvPr id="728296629" name=""/>
+          <p:cNvPr id="498758068" name=""/>
           <p:cNvSpPr/>
           <p:nvPr/>
         </p:nvSpPr>
@@ -6504,7 +6504,7 @@
       </p:sp>
       <p:sp>
         <p:nvSpPr>
-          <p:cNvPr id="585650919" name=""/>
+          <p:cNvPr id="1462069066" name=""/>
           <p:cNvSpPr/>
           <p:nvPr/>
         </p:nvSpPr>
@@ -6569,7 +6569,7 @@
       </p:sp>
       <p:sp>
         <p:nvSpPr>
-          <p:cNvPr id="979107359" name=""/>
+          <p:cNvPr id="106065441" name=""/>
           <p:cNvSpPr/>
           <p:nvPr/>
         </p:nvSpPr>
@@ -6634,7 +6634,7 @@
       </p:sp>
       <p:sp>
         <p:nvSpPr>
-          <p:cNvPr id="1646002239" name=""/>
+          <p:cNvPr id="2097635882" name=""/>
           <p:cNvSpPr/>
           <p:nvPr/>
         </p:nvSpPr>
@@ -6691,7 +6691,7 @@
       </p:sp>
       <p:sp>
         <p:nvSpPr>
-          <p:cNvPr id="1131314414" name=""/>
+          <p:cNvPr id="1515991133" name=""/>
           <p:cNvSpPr txBox="1"/>
           <p:nvPr/>
         </p:nvSpPr>
@@ -6738,7 +6738,7 @@
       </p:sp>
       <p:sp>
         <p:nvSpPr>
-          <p:cNvPr id="1865479008" name=""/>
+          <p:cNvPr id="1741201713" name=""/>
           <p:cNvSpPr txBox="1"/>
           <p:nvPr/>
         </p:nvSpPr>
@@ -6808,7 +6808,7 @@
       </p:sp>
       <p:sp>
         <p:nvSpPr>
-          <p:cNvPr id="954089651" name=""/>
+          <p:cNvPr id="2146218258" name=""/>
           <p:cNvSpPr/>
           <p:nvPr/>
         </p:nvSpPr>
@@ -6873,7 +6873,7 @@
       </p:sp>
       <p:sp>
         <p:nvSpPr>
-          <p:cNvPr id="641638402" name=""/>
+          <p:cNvPr id="172930860" name=""/>
           <p:cNvSpPr/>
           <p:nvPr/>
         </p:nvSpPr>
@@ -6930,7 +6930,7 @@
       </p:sp>
       <p:sp>
         <p:nvSpPr>
-          <p:cNvPr id="1978978489" name=""/>
+          <p:cNvPr id="543479978" name=""/>
           <p:cNvSpPr/>
           <p:nvPr/>
         </p:nvSpPr>
@@ -6995,7 +6995,7 @@
       </p:sp>
       <p:sp>
         <p:nvSpPr>
-          <p:cNvPr id="119686099" name=""/>
+          <p:cNvPr id="18601445" name=""/>
           <p:cNvSpPr/>
           <p:nvPr/>
         </p:nvSpPr>
@@ -7052,7 +7052,7 @@
       </p:sp>
       <p:sp>
         <p:nvSpPr>
-          <p:cNvPr id="876359004" name=""/>
+          <p:cNvPr id="606650425" name=""/>
           <p:cNvSpPr/>
           <p:nvPr/>
         </p:nvSpPr>
@@ -7117,7 +7117,7 @@
       </p:sp>
       <p:sp>
         <p:nvSpPr>
-          <p:cNvPr id="783345820" name=""/>
+          <p:cNvPr id="2052329349" name=""/>
           <p:cNvSpPr/>
           <p:nvPr/>
         </p:nvSpPr>
@@ -7192,7 +7192,7 @@
       </p:sp>
       <p:cxnSp>
         <p:nvCxnSpPr>
-          <p:cNvPr id="329329681" name=""/>
+          <p:cNvPr id="67520449" name=""/>
           <p:cNvCxnSpPr/>
           <p:nvPr/>
         </p:nvCxnSpPr>
@@ -7236,7 +7236,7 @@
       </p:cxnSp>
       <p:cxnSp>
         <p:nvCxnSpPr>
-          <p:cNvPr id="17820242" name=""/>
+          <p:cNvPr id="1581026528" name=""/>
           <p:cNvCxnSpPr/>
           <p:nvPr/>
         </p:nvCxnSpPr>
@@ -7280,7 +7280,7 @@
       </p:cxnSp>
       <p:cxnSp>
         <p:nvCxnSpPr>
-          <p:cNvPr id="231805855" name=""/>
+          <p:cNvPr id="1651979186" name=""/>
           <p:cNvCxnSpPr/>
           <p:nvPr/>
         </p:nvCxnSpPr>
@@ -7324,7 +7324,7 @@
       </p:cxnSp>
       <p:cxnSp>
         <p:nvCxnSpPr>
-          <p:cNvPr id="1293555677" name=""/>
+          <p:cNvPr id="1398236873" name=""/>
           <p:cNvCxnSpPr/>
           <p:nvPr/>
         </p:nvCxnSpPr>
@@ -7368,7 +7368,7 @@
       </p:cxnSp>
       <p:cxnSp>
         <p:nvCxnSpPr>
-          <p:cNvPr id="1496405843" name=""/>
+          <p:cNvPr id="1771728905" name=""/>
           <p:cNvCxnSpPr/>
           <p:nvPr/>
         </p:nvCxnSpPr>
@@ -7412,7 +7412,7 @@
       </p:cxnSp>
       <p:cxnSp>
         <p:nvCxnSpPr>
-          <p:cNvPr id="1622252735" name=""/>
+          <p:cNvPr id="1534903868" name=""/>
           <p:cNvCxnSpPr/>
           <p:nvPr/>
         </p:nvCxnSpPr>
@@ -7456,7 +7456,7 @@
       </p:cxnSp>
       <p:cxnSp>
         <p:nvCxnSpPr>
-          <p:cNvPr id="136265135" name=""/>
+          <p:cNvPr id="1708985935" name=""/>
           <p:cNvCxnSpPr/>
           <p:nvPr/>
         </p:nvCxnSpPr>
@@ -7500,7 +7500,7 @@
       </p:cxnSp>
       <p:cxnSp>
         <p:nvCxnSpPr>
-          <p:cNvPr id="212424316" name=""/>
+          <p:cNvPr id="435063400" name=""/>
           <p:cNvCxnSpPr/>
           <p:nvPr/>
         </p:nvCxnSpPr>
@@ -7542,7 +7542,7 @@
       </p:cxnSp>
       <p:cxnSp>
         <p:nvCxnSpPr>
-          <p:cNvPr id="543518620" name=""/>
+          <p:cNvPr id="729340739" name=""/>
           <p:cNvCxnSpPr/>
           <p:nvPr/>
         </p:nvCxnSpPr>
@@ -7586,7 +7586,7 @@
       </p:cxnSp>
       <p:cxnSp>
         <p:nvCxnSpPr>
-          <p:cNvPr id="1059281313" name=""/>
+          <p:cNvPr id="1216568187" name=""/>
           <p:cNvCxnSpPr/>
           <p:nvPr/>
         </p:nvCxnSpPr>
@@ -7628,7 +7628,7 @@
       </p:cxnSp>
       <p:sp>
         <p:nvSpPr>
-          <p:cNvPr id="644523237" name=""/>
+          <p:cNvPr id="1083238513" name=""/>
           <p:cNvSpPr/>
           <p:nvPr/>
         </p:nvSpPr>
@@ -7837,7 +7837,7 @@
       </p:sp>
       <p:sp>
         <p:nvSpPr>
-          <p:cNvPr id="1178595625" name=""/>
+          <p:cNvPr id="29312406" name=""/>
           <p:cNvSpPr/>
           <p:nvPr/>
         </p:nvSpPr>
@@ -7942,7 +7942,7 @@
       </p:sp>
       <p:sp>
         <p:nvSpPr>
-          <p:cNvPr id="1042845327" name=""/>
+          <p:cNvPr id="775743777" name=""/>
           <p:cNvSpPr/>
           <p:nvPr/>
         </p:nvSpPr>
@@ -8017,13 +8017,13 @@
       </p:sp>
       <p:sp>
         <p:nvSpPr>
-          <p:cNvPr id="893624841" name=""/>
+          <p:cNvPr id="1593368639" name=""/>
           <p:cNvSpPr/>
           <p:nvPr/>
         </p:nvSpPr>
         <p:spPr bwMode="auto">
           <a:xfrm rot="0" flipH="0" flipV="0">
-            <a:off x="23421211" y="21043871"/>
+            <a:off x="23421210" y="21043871"/>
             <a:ext cx="2876549" cy="1726444"/>
           </a:xfrm>
           <a:prstGeom prst="roundRect">
@@ -8154,13 +8154,13 @@
       </p:sp>
       <p:sp>
         <p:nvSpPr>
-          <p:cNvPr id="839446687" name=""/>
+          <p:cNvPr id="982734764" name=""/>
           <p:cNvSpPr/>
           <p:nvPr/>
         </p:nvSpPr>
         <p:spPr bwMode="auto">
           <a:xfrm rot="0" flipH="0" flipV="0">
-            <a:off x="23421211" y="21043871"/>
+            <a:off x="23421210" y="21043871"/>
             <a:ext cx="2876549" cy="640594"/>
           </a:xfrm>
           <a:prstGeom prst="roundRect">
@@ -8211,7 +8211,7 @@
       </p:sp>
       <p:sp>
         <p:nvSpPr>
-          <p:cNvPr id="1946057736" name=""/>
+          <p:cNvPr id="916563256" name=""/>
           <p:cNvSpPr/>
           <p:nvPr/>
         </p:nvSpPr>
@@ -8348,7 +8348,7 @@
       </p:sp>
       <p:sp>
         <p:nvSpPr>
-          <p:cNvPr id="1114823671" name=""/>
+          <p:cNvPr id="1474303336" name=""/>
           <p:cNvSpPr/>
           <p:nvPr/>
         </p:nvSpPr>
@@ -8405,7 +8405,7 @@
       </p:sp>
       <p:sp>
         <p:nvSpPr>
-          <p:cNvPr id="646571305" name=""/>
+          <p:cNvPr id="1250722252" name=""/>
           <p:cNvSpPr/>
           <p:nvPr/>
         </p:nvSpPr>
@@ -8508,7 +8508,7 @@
       </p:sp>
       <p:sp>
         <p:nvSpPr>
-          <p:cNvPr id="690619549" name=""/>
+          <p:cNvPr id="1173862004" name=""/>
           <p:cNvSpPr/>
           <p:nvPr/>
         </p:nvSpPr>
@@ -8570,7 +8570,7 @@
       </p:sp>
       <p:sp>
         <p:nvSpPr>
-          <p:cNvPr id="1342055441" name=""/>
+          <p:cNvPr id="1470661379" name=""/>
           <p:cNvSpPr/>
           <p:nvPr/>
         </p:nvSpPr>
@@ -8672,7 +8672,7 @@
       </p:sp>
       <p:sp>
         <p:nvSpPr>
-          <p:cNvPr id="1679010636" name=""/>
+          <p:cNvPr id="59904048" name=""/>
           <p:cNvSpPr/>
           <p:nvPr/>
         </p:nvSpPr>
@@ -8729,7 +8729,7 @@
       </p:sp>
       <p:sp>
         <p:nvSpPr>
-          <p:cNvPr id="264636197" name=""/>
+          <p:cNvPr id="1713218021" name=""/>
           <p:cNvSpPr/>
           <p:nvPr/>
         </p:nvSpPr>
@@ -8833,7 +8833,7 @@
       </p:sp>
       <p:sp>
         <p:nvSpPr>
-          <p:cNvPr id="563054437" name=""/>
+          <p:cNvPr id="1932509653" name=""/>
           <p:cNvSpPr/>
           <p:nvPr/>
         </p:nvSpPr>
@@ -8898,7 +8898,7 @@
       </p:sp>
       <p:sp>
         <p:nvSpPr>
-          <p:cNvPr id="1271258850" name=""/>
+          <p:cNvPr id="1895481845" name=""/>
           <p:cNvSpPr/>
           <p:nvPr/>
         </p:nvSpPr>
@@ -9001,7 +9001,7 @@
       </p:sp>
       <p:sp>
         <p:nvSpPr>
-          <p:cNvPr id="590121065" name=""/>
+          <p:cNvPr id="293553878" name=""/>
           <p:cNvSpPr/>
           <p:nvPr/>
         </p:nvSpPr>
@@ -9063,10 +9063,10 @@
       </p:sp>
       <p:cxnSp>
         <p:nvCxnSpPr>
-          <p:cNvPr id="1035250037" name=""/>
+          <p:cNvPr id="1753255505" name=""/>
           <p:cNvCxnSpPr>
-            <a:stCxn id="264636197" idx="3"/>
-            <a:endCxn id="1342055441" idx="1"/>
+            <a:stCxn id="1713218021" idx="3"/>
+            <a:endCxn id="1470661379" idx="1"/>
           </p:cNvCxnSpPr>
           <p:nvPr/>
         </p:nvCxnSpPr>
@@ -9110,9 +9110,9 @@
       </p:cxnSp>
       <p:cxnSp>
         <p:nvCxnSpPr>
-          <p:cNvPr id="798145419" name=""/>
+          <p:cNvPr id="819072456" name=""/>
           <p:cNvCxnSpPr>
-            <a:endCxn id="893624841" idx="1"/>
+            <a:endCxn id="1593368639" idx="1"/>
           </p:cNvCxnSpPr>
           <p:nvPr/>
         </p:nvCxnSpPr>
@@ -9154,10 +9154,10 @@
       </p:cxnSp>
       <p:cxnSp>
         <p:nvCxnSpPr>
-          <p:cNvPr id="1700810416" name=""/>
+          <p:cNvPr id="1087607027" name=""/>
           <p:cNvCxnSpPr>
-            <a:stCxn id="1271258850" idx="2"/>
-            <a:endCxn id="893624841" idx="3"/>
+            <a:stCxn id="1895481845" idx="2"/>
+            <a:endCxn id="1593368639" idx="3"/>
           </p:cNvCxnSpPr>
           <p:nvPr/>
         </p:nvCxnSpPr>
@@ -9199,17 +9199,17 @@
       </p:cxnSp>
       <p:cxnSp>
         <p:nvCxnSpPr>
-          <p:cNvPr id="424375558" name=""/>
+          <p:cNvPr id="1109268509" name=""/>
           <p:cNvCxnSpPr>
-            <a:stCxn id="264636197" idx="2"/>
-            <a:endCxn id="839446687" idx="0"/>
+            <a:stCxn id="1713218021" idx="2"/>
+            <a:endCxn id="982734764" idx="0"/>
           </p:cNvCxnSpPr>
           <p:nvPr/>
         </p:nvCxnSpPr>
         <p:spPr bwMode="auto">
           <a:xfrm rot="5400000" flipH="0" flipV="1">
             <a:off x="22054040" y="18238425"/>
-            <a:ext cx="3390044" cy="2220848"/>
+            <a:ext cx="3390043" cy="2220848"/>
           </a:xfrm>
           <a:prstGeom prst="curvedConnector3">
             <a:avLst>
@@ -9246,7 +9246,7 @@
       </p:cxnSp>
       <p:cxnSp>
         <p:nvCxnSpPr>
-          <p:cNvPr id="1570519387" name=""/>
+          <p:cNvPr id="528596443" name=""/>
           <p:cNvCxnSpPr/>
           <p:nvPr/>
         </p:nvCxnSpPr>
@@ -9290,7 +9290,7 @@
       </p:cxnSp>
       <p:sp>
         <p:nvSpPr>
-          <p:cNvPr id="1877735055" name=""/>
+          <p:cNvPr id="893958795" name=""/>
           <p:cNvSpPr/>
           <p:nvPr/>
         </p:nvSpPr>
@@ -9427,7 +9427,7 @@
       </p:sp>
       <p:sp>
         <p:nvSpPr>
-          <p:cNvPr id="695073650" name=""/>
+          <p:cNvPr id="995893522" name=""/>
           <p:cNvSpPr/>
           <p:nvPr/>
         </p:nvSpPr>
@@ -9484,10 +9484,10 @@
       </p:sp>
       <p:cxnSp>
         <p:nvCxnSpPr>
-          <p:cNvPr id="60343735" name=""/>
+          <p:cNvPr id="203840190" name=""/>
           <p:cNvCxnSpPr>
-            <a:stCxn id="893624841" idx="2"/>
-            <a:endCxn id="1946057736" idx="1"/>
+            <a:stCxn id="1593368639" idx="2"/>
+            <a:endCxn id="916563256" idx="1"/>
           </p:cNvCxnSpPr>
           <p:nvPr/>
         </p:nvCxnSpPr>
@@ -9529,10 +9529,10 @@
       </p:cxnSp>
       <p:cxnSp>
         <p:nvCxnSpPr>
-          <p:cNvPr id="674776259" name=""/>
+          <p:cNvPr id="1301206974" name=""/>
           <p:cNvCxnSpPr>
-            <a:stCxn id="893624841" idx="2"/>
-            <a:endCxn id="695073650" idx="0"/>
+            <a:stCxn id="1593368639" idx="2"/>
+            <a:endCxn id="995893522" idx="0"/>
           </p:cNvCxnSpPr>
           <p:nvPr/>
         </p:nvCxnSpPr>
@@ -9576,9 +9576,9 @@
       </p:cxnSp>
       <p:cxnSp>
         <p:nvCxnSpPr>
-          <p:cNvPr id="187513709" name=""/>
+          <p:cNvPr id="464530656" name=""/>
           <p:cNvCxnSpPr>
-            <a:stCxn id="1946057736" idx="2"/>
+            <a:stCxn id="916563256" idx="2"/>
           </p:cNvCxnSpPr>
           <p:nvPr/>
         </p:nvCxnSpPr>
@@ -9620,7 +9620,7 @@
       </p:cxnSp>
       <p:sp>
         <p:nvSpPr>
-          <p:cNvPr id="1976558395" name=""/>
+          <p:cNvPr id="970342890" name=""/>
           <p:cNvSpPr txBox="1"/>
           <p:nvPr/>
         </p:nvSpPr>
@@ -9659,7 +9659,7 @@
       </p:sp>
       <p:sp>
         <p:nvSpPr>
-          <p:cNvPr id="1505732284" name=""/>
+          <p:cNvPr id="1284647052" name=""/>
           <p:cNvSpPr txBox="1"/>
           <p:nvPr/>
         </p:nvSpPr>
@@ -9698,7 +9698,7 @@
       </p:sp>
       <p:sp>
         <p:nvSpPr>
-          <p:cNvPr id="733433514" name=""/>
+          <p:cNvPr id="1935121781" name=""/>
           <p:cNvSpPr txBox="1"/>
           <p:nvPr/>
         </p:nvSpPr>
@@ -9737,7 +9737,7 @@
       </p:sp>
       <p:sp>
         <p:nvSpPr>
-          <p:cNvPr id="352913174" name="Shape 28"/>
+          <p:cNvPr id="1642791742" name="Shape 28"/>
           <p:cNvSpPr/>
           <p:nvPr/>
         </p:nvSpPr>
@@ -9761,7 +9761,7 @@
       </p:sp>
       <p:sp>
         <p:nvSpPr>
-          <p:cNvPr id="399470489" name="Text 97"/>
+          <p:cNvPr id="1598232382" name="Text 97"/>
           <p:cNvSpPr/>
           <p:nvPr/>
         </p:nvSpPr>
@@ -9836,7 +9836,7 @@
       </p:sp>
       <p:sp>
         <p:nvSpPr>
-          <p:cNvPr id="155786299" name="Text 97"/>
+          <p:cNvPr id="1296555367" name="Text 97"/>
           <p:cNvSpPr/>
           <p:nvPr/>
         </p:nvSpPr>
@@ -10030,10 +10030,10 @@
                 <a:ea typeface="Roboto"/>
                 <a:cs typeface="Roboto"/>
               </a:rPr>
-              <a:t>• риски MITM и подмены</a:t>
-            </a:r>
-            <a:r>
-              <a:rPr lang="en-US" sz="3200" b="0" i="0" u="none" strike="noStrike" cap="none" spc="0">
+              <a:t>• </a:t>
+            </a:r>
+            <a:r>
+              <a:rPr lang="ru-RU" sz="3200" b="0" i="0" u="none" strike="noStrike" cap="none" spc="0">
                 <a:solidFill>
                   <a:srgbClr val="0F172A"/>
                 </a:solidFill>
@@ -10041,7 +10041,7 @@
                 <a:ea typeface="Roboto"/>
                 <a:cs typeface="Roboto"/>
               </a:rPr>
-              <a:t>.</a:t>
+              <a:t>санкции.</a:t>
             </a:r>
             <a:endParaRPr sz="3200">
               <a:latin typeface="Roboto"/>
@@ -10058,7 +10058,7 @@
       </p:sp>
       <p:sp>
         <p:nvSpPr>
-          <p:cNvPr id="1882100490" name="Text 97"/>
+          <p:cNvPr id="1425293051" name="Text 97"/>
           <p:cNvSpPr/>
           <p:nvPr/>
         </p:nvSpPr>
@@ -10207,7 +10207,7 @@
       </p:sp>
       <p:sp>
         <p:nvSpPr>
-          <p:cNvPr id="1420096807" name="Text 97"/>
+          <p:cNvPr id="2098757261" name="Text 97"/>
           <p:cNvSpPr/>
           <p:nvPr/>
         </p:nvSpPr>
@@ -10640,7 +10640,7 @@
       </p:sp>
       <p:sp>
         <p:nvSpPr>
-          <p:cNvPr id="626233744" name="Text 97"/>
+          <p:cNvPr id="286833952" name="Text 97"/>
           <p:cNvSpPr/>
           <p:nvPr/>
         </p:nvSpPr>
@@ -10823,7 +10823,7 @@
       </p:sp>
       <p:sp>
         <p:nvSpPr>
-          <p:cNvPr id="1733536030" name=""/>
+          <p:cNvPr id="200608978" name=""/>
           <p:cNvSpPr txBox="1"/>
           <p:nvPr/>
         </p:nvSpPr>
@@ -11243,7 +11243,7 @@
       </p:sp>
       <p:sp>
         <p:nvSpPr>
-          <p:cNvPr id="1231359540" name="Text 134"/>
+          <p:cNvPr id="1848227606" name="Text 134"/>
           <p:cNvSpPr/>
           <p:nvPr/>
         </p:nvSpPr>
@@ -11288,7 +11288,7 @@
       </p:sp>
       <p:sp>
         <p:nvSpPr>
-          <p:cNvPr id="716246688" name="Shape 28"/>
+          <p:cNvPr id="747740015" name="Shape 28"/>
           <p:cNvSpPr/>
           <p:nvPr/>
         </p:nvSpPr>
@@ -11312,7 +11312,7 @@
       </p:sp>
       <p:sp>
         <p:nvSpPr>
-          <p:cNvPr id="1548430032" name=""/>
+          <p:cNvPr id="710089921" name=""/>
           <p:cNvSpPr/>
           <p:nvPr/>
         </p:nvSpPr>
@@ -11373,7 +11373,7 @@
       </p:sp>
       <p:sp>
         <p:nvSpPr>
-          <p:cNvPr id="1142260938" name=""/>
+          <p:cNvPr id="2109293888" name=""/>
           <p:cNvSpPr/>
           <p:nvPr/>
         </p:nvSpPr>
@@ -11434,7 +11434,7 @@
       </p:sp>
       <p:sp>
         <p:nvSpPr>
-          <p:cNvPr id="2106351909" name=""/>
+          <p:cNvPr id="2045092821" name=""/>
           <p:cNvSpPr/>
           <p:nvPr/>
         </p:nvSpPr>
@@ -11495,7 +11495,7 @@
       </p:sp>
       <p:sp>
         <p:nvSpPr>
-          <p:cNvPr id="88690078" name=""/>
+          <p:cNvPr id="1014902887" name=""/>
           <p:cNvSpPr/>
           <p:nvPr/>
         </p:nvSpPr>
@@ -11556,12 +11556,12 @@
       </p:sp>
       <p:sp>
         <p:nvSpPr>
-          <p:cNvPr id="992424738" name="Shape 28"/>
+          <p:cNvPr id="775719185" name="Shape 28"/>
           <p:cNvSpPr/>
           <p:nvPr/>
         </p:nvSpPr>
         <p:spPr bwMode="auto">
-          <a:xfrm rot="6897683" flipH="0" flipV="1">
+          <a:xfrm rot="6897682" flipH="0" flipV="1">
             <a:off x="5851358" y="10647198"/>
             <a:ext cx="830464" cy="386570"/>
           </a:xfrm>
@@ -11580,7 +11580,7 @@
       </p:sp>
       <p:sp>
         <p:nvSpPr>
-          <p:cNvPr id="1967229890" name="Shape 28"/>
+          <p:cNvPr id="250582515" name="Shape 28"/>
           <p:cNvSpPr/>
           <p:nvPr/>
         </p:nvSpPr>
@@ -11604,7 +11604,7 @@
       </p:sp>
       <p:sp>
         <p:nvSpPr>
-          <p:cNvPr id="96304877" name="Shape 28"/>
+          <p:cNvPr id="848970547" name="Shape 28"/>
           <p:cNvSpPr/>
           <p:nvPr/>
         </p:nvSpPr>
@@ -11628,7 +11628,7 @@
       </p:sp>
       <p:sp>
         <p:nvSpPr>
-          <p:cNvPr id="1679585256" name="Text 97"/>
+          <p:cNvPr id="1480724698" name="Text 97"/>
           <p:cNvSpPr/>
           <p:nvPr/>
         </p:nvSpPr>
@@ -11731,14 +11731,14 @@
       </p:sp>
       <p:sp>
         <p:nvSpPr>
-          <p:cNvPr id="478348195" name=""/>
+          <p:cNvPr id="830918991" name=""/>
           <p:cNvSpPr txBox="1"/>
           <p:nvPr/>
         </p:nvSpPr>
         <p:spPr bwMode="auto">
           <a:xfrm rot="0" flipH="0" flipV="0">
-            <a:off x="-32939" y="41702271"/>
-            <a:ext cx="30311963" cy="823319"/>
+            <a:off x="-32938" y="41702270"/>
+            <a:ext cx="30334642" cy="823319"/>
           </a:xfrm>
           <a:prstGeom prst="rect">
             <a:avLst/>
@@ -11754,6 +11754,17 @@
               <a:defRPr/>
             </a:pPr>
             <a:r>
+              <a:rPr lang="en-US" sz="4800" b="1" i="0" u="none" strike="noStrike" cap="none" spc="0">
+                <a:solidFill>
+                  <a:srgbClr val="F8FAFC"/>
+                </a:solidFill>
+                <a:latin typeface="Roboto"/>
+                <a:ea typeface="Roboto"/>
+                <a:cs typeface="Roboto"/>
+              </a:rPr>
+              <a:t>—————————————————</a:t>
+            </a:r>
+            <a:r>
               <a:rPr lang="ru-RU" sz="4800" b="1">
                 <a:solidFill>
                   <a:srgbClr val="F8FAFC"/>
@@ -11762,7 +11773,29 @@
                 <a:ea typeface="Roboto"/>
                 <a:cs typeface="Roboto"/>
               </a:rPr>
-              <a:t>ВСОШ — ИНФОРМАЦИОННАЯ БЕЗОПАСНОСТЬ — ЗАКЛЮЧИТЕЛЬНЫЙ ЭТАП</a:t>
+              <a:t> </a:t>
+            </a:r>
+            <a:r>
+              <a:rPr lang="en-US" sz="4800" b="1">
+                <a:solidFill>
+                  <a:srgbClr val="F8FAFC"/>
+                </a:solidFill>
+                <a:latin typeface="Roboto"/>
+                <a:ea typeface="Roboto"/>
+                <a:cs typeface="Roboto"/>
+              </a:rPr>
+              <a:t>BLUE TEAM </a:t>
+            </a:r>
+            <a:r>
+              <a:rPr lang="en-US" sz="4800" b="1" i="0" u="none" strike="noStrike" cap="none" spc="0">
+                <a:solidFill>
+                  <a:srgbClr val="F8FAFC"/>
+                </a:solidFill>
+                <a:latin typeface="Roboto"/>
+                <a:ea typeface="Roboto"/>
+                <a:cs typeface="Roboto"/>
+              </a:rPr>
+              <a:t>—————————————————</a:t>
             </a:r>
             <a:endParaRPr sz="4800" b="1">
               <a:solidFill>
